--- a/亮晶燈.pptx
+++ b/亮晶燈.pptx
@@ -309,7 +309,7 @@
           <a:p>
             <a:fld id="{982F74A0-5549-4DEA-895A-B6477C30BB93}" type="datetimeFigureOut">
               <a:rPr lang="zh-TW" altLang="en-US" smtClean="0"/>
-              <a:t>2024/1/13</a:t>
+              <a:t>2025/11/7</a:t>
             </a:fld>
             <a:endParaRPr lang="zh-TW" altLang="en-US"/>
           </a:p>
@@ -474,7 +474,7 @@
           <a:p>
             <a:fld id="{982F74A0-5549-4DEA-895A-B6477C30BB93}" type="datetimeFigureOut">
               <a:rPr lang="zh-TW" altLang="en-US" smtClean="0"/>
-              <a:t>2024/1/13</a:t>
+              <a:t>2025/11/7</a:t>
             </a:fld>
             <a:endParaRPr lang="zh-TW" altLang="en-US"/>
           </a:p>
@@ -649,7 +649,7 @@
           <a:p>
             <a:fld id="{982F74A0-5549-4DEA-895A-B6477C30BB93}" type="datetimeFigureOut">
               <a:rPr lang="zh-TW" altLang="en-US" smtClean="0"/>
-              <a:t>2024/1/13</a:t>
+              <a:t>2025/11/7</a:t>
             </a:fld>
             <a:endParaRPr lang="zh-TW" altLang="en-US"/>
           </a:p>
@@ -814,7 +814,7 @@
           <a:p>
             <a:fld id="{982F74A0-5549-4DEA-895A-B6477C30BB93}" type="datetimeFigureOut">
               <a:rPr lang="zh-TW" altLang="en-US" smtClean="0"/>
-              <a:t>2024/1/13</a:t>
+              <a:t>2025/11/7</a:t>
             </a:fld>
             <a:endParaRPr lang="zh-TW" altLang="en-US"/>
           </a:p>
@@ -1055,7 +1055,7 @@
           <a:p>
             <a:fld id="{982F74A0-5549-4DEA-895A-B6477C30BB93}" type="datetimeFigureOut">
               <a:rPr lang="zh-TW" altLang="en-US" smtClean="0"/>
-              <a:t>2024/1/13</a:t>
+              <a:t>2025/11/7</a:t>
             </a:fld>
             <a:endParaRPr lang="zh-TW" altLang="en-US"/>
           </a:p>
@@ -1338,7 +1338,7 @@
           <a:p>
             <a:fld id="{982F74A0-5549-4DEA-895A-B6477C30BB93}" type="datetimeFigureOut">
               <a:rPr lang="zh-TW" altLang="en-US" smtClean="0"/>
-              <a:t>2024/1/13</a:t>
+              <a:t>2025/11/7</a:t>
             </a:fld>
             <a:endParaRPr lang="zh-TW" altLang="en-US"/>
           </a:p>
@@ -1755,7 +1755,7 @@
           <a:p>
             <a:fld id="{982F74A0-5549-4DEA-895A-B6477C30BB93}" type="datetimeFigureOut">
               <a:rPr lang="zh-TW" altLang="en-US" smtClean="0"/>
-              <a:t>2024/1/13</a:t>
+              <a:t>2025/11/7</a:t>
             </a:fld>
             <a:endParaRPr lang="zh-TW" altLang="en-US"/>
           </a:p>
@@ -1868,7 +1868,7 @@
           <a:p>
             <a:fld id="{982F74A0-5549-4DEA-895A-B6477C30BB93}" type="datetimeFigureOut">
               <a:rPr lang="zh-TW" altLang="en-US" smtClean="0"/>
-              <a:t>2024/1/13</a:t>
+              <a:t>2025/11/7</a:t>
             </a:fld>
             <a:endParaRPr lang="zh-TW" altLang="en-US"/>
           </a:p>
@@ -1958,7 +1958,7 @@
           <a:p>
             <a:fld id="{982F74A0-5549-4DEA-895A-B6477C30BB93}" type="datetimeFigureOut">
               <a:rPr lang="zh-TW" altLang="en-US" smtClean="0"/>
-              <a:t>2024/1/13</a:t>
+              <a:t>2025/11/7</a:t>
             </a:fld>
             <a:endParaRPr lang="zh-TW" altLang="en-US"/>
           </a:p>
@@ -2230,7 +2230,7 @@
           <a:p>
             <a:fld id="{982F74A0-5549-4DEA-895A-B6477C30BB93}" type="datetimeFigureOut">
               <a:rPr lang="zh-TW" altLang="en-US" smtClean="0"/>
-              <a:t>2024/1/13</a:t>
+              <a:t>2025/11/7</a:t>
             </a:fld>
             <a:endParaRPr lang="zh-TW" altLang="en-US"/>
           </a:p>
@@ -2482,7 +2482,7 @@
           <a:p>
             <a:fld id="{982F74A0-5549-4DEA-895A-B6477C30BB93}" type="datetimeFigureOut">
               <a:rPr lang="zh-TW" altLang="en-US" smtClean="0"/>
-              <a:t>2024/1/13</a:t>
+              <a:t>2025/11/7</a:t>
             </a:fld>
             <a:endParaRPr lang="zh-TW" altLang="en-US"/>
           </a:p>
@@ -2693,7 +2693,7 @@
           <a:p>
             <a:fld id="{982F74A0-5549-4DEA-895A-B6477C30BB93}" type="datetimeFigureOut">
               <a:rPr lang="zh-TW" altLang="en-US" smtClean="0"/>
-              <a:t>2024/1/13</a:t>
+              <a:t>2025/11/7</a:t>
             </a:fld>
             <a:endParaRPr lang="zh-TW" altLang="en-US"/>
           </a:p>
@@ -3352,7 +3352,29 @@
                 <a:latin typeface="微軟正黑體" pitchFamily="34" charset="-120"/>
                 <a:ea typeface="微軟正黑體" pitchFamily="34" charset="-120"/>
               </a:rPr>
-              <a:t>口 口 口要發光我全身都發光</a:t>
+              <a:t>口 口 口要發光</a:t>
+            </a:r>
+            <a:endParaRPr lang="en-US" altLang="zh-TW" sz="4800" b="1" dirty="0">
+              <a:solidFill>
+                <a:srgbClr val="000066"/>
+              </a:solidFill>
+              <a:latin typeface="微軟正黑體" pitchFamily="34" charset="-120"/>
+              <a:ea typeface="微軟正黑體" pitchFamily="34" charset="-120"/>
+            </a:endParaRPr>
+          </a:p>
+          <a:p>
+            <a:pPr algn="ctr">
+              <a:buNone/>
+            </a:pPr>
+            <a:r>
+              <a:rPr lang="zh-TW" altLang="en-US" sz="4800" b="1" dirty="0">
+                <a:solidFill>
+                  <a:srgbClr val="000066"/>
+                </a:solidFill>
+                <a:latin typeface="微軟正黑體" pitchFamily="34" charset="-120"/>
+                <a:ea typeface="微軟正黑體" pitchFamily="34" charset="-120"/>
+              </a:rPr>
+              <a:t>我全身都發光</a:t>
             </a:r>
           </a:p>
         </p:txBody>
